--- a/docs/NeuroVision_AI_Presentation.pptx
+++ b/docs/NeuroVision_AI_Presentation.pptx
@@ -3351,7 +3351,7 @@
                   <a:srgbClr val="CBD5E1"/>
                 </a:solidFill>
               </a:rPr>
-              <a:t>Saranya (Internship ID: IBMUEML004123)</a:t>
+              <a:t>P Saranya (Internship ID: IBMUEML010400)</a:t>
             </a:r>
           </a:p>
           <a:p>
